--- a/public/fun/pack/pptx/family/가족소개_32_아이와함께_도서관창가.pptx
+++ b/public/fun/pack/pptx/family/가족소개_32_아이와함께_도서관창가.pptx
@@ -3286,6 +3286,14 @@
 <file path=ppt/slides/slide1.xml><?xml version="1.0" encoding="utf-8"?>
 <p:sld xmlns:a="http://schemas.openxmlformats.org/drawingml/2006/main" xmlns:p="http://schemas.openxmlformats.org/presentationml/2006/main" xmlns:r="http://schemas.openxmlformats.org/officeDocument/2006/relationships">
   <p:cSld>
+    <p:bg>
+      <p:bgPr>
+        <a:solidFill>
+          <a:srgbClr val="FBF2EC"/>
+        </a:solidFill>
+        <a:effectLst/>
+      </p:bgPr>
+    </p:bg>
     <p:spTree>
       <p:nvGrpSpPr>
         <p:cNvPr id="1" name=""/>
@@ -3293,30 +3301,116 @@
         <p:nvPr/>
       </p:nvGrpSpPr>
       <p:grpSpPr/>
-      <p:pic>
-        <p:nvPicPr>
-          <p:cNvPr id="3" name="표지 그림" descr="family-32.jpg"/>
-          <p:cNvPicPr>
-            <a:picLocks noChangeAspect="1"/>
-          </p:cNvPicPr>
-          <p:nvPr/>
-        </p:nvPicPr>
-        <p:blipFill>
-          <a:blip r:embed="rId2"/>
-          <a:stretch>
-            <a:fillRect/>
-          </a:stretch>
-        </p:blipFill>
-        <p:spPr>
-          <a:xfrm>
-            <a:off x="0" y="0"/>
-            <a:ext cx="12191695" cy="6858000"/>
+      <p:sp>
+        <p:nvSpPr>
+          <p:cNvPr id="3" name="사진 자리"/>
+          <p:cNvSpPr/>
+          <p:nvPr/>
+        </p:nvSpPr>
+        <p:spPr>
+          <a:xfrm>
+            <a:off x="7802684" y="0"/>
+            <a:ext cx="4389010" cy="6858000"/>
           </a:xfrm>
           <a:prstGeom prst="rect">
             <a:avLst/>
           </a:prstGeom>
-        </p:spPr>
-      </p:pic>
+          <a:solidFill>
+            <a:srgbClr val="EBC6AD"/>
+          </a:solidFill>
+          <a:ln>
+            <a:noFill/>
+          </a:ln>
+        </p:spPr>
+        <p:txBody>
+          <a:bodyPr rtlCol="0" anchor="ctr" wrap="square" lIns="54864" rIns="54864" tIns="27432" bIns="27432">
+            <a:noAutofit/>
+          </a:bodyPr>
+          <a:lstStyle/>
+          <a:p>
+            <a:pPr algn="ctr">
+              <a:lnSpc>
+                <a:spcPct val="100000"/>
+              </a:lnSpc>
+            </a:pPr>
+            <a:r>
+              <a:rPr sz="1400" b="0" i="0">
+                <a:solidFill>
+                  <a:srgbClr val="493527"/>
+                </a:solidFill>
+              </a:rPr>
+              <a:t>사진을 넣어 주세요</a:t>
+            </a:r>
+          </a:p>
+        </p:txBody>
+      </p:sp>
+      <p:sp>
+        <p:nvSpPr>
+          <p:cNvPr id="4" name="장식"/>
+          <p:cNvSpPr/>
+          <p:nvPr/>
+        </p:nvSpPr>
+        <p:spPr>
+          <a:xfrm>
+            <a:off x="8168435" y="365760"/>
+            <a:ext cx="3657508" cy="6126480"/>
+          </a:xfrm>
+          <a:prstGeom prst="rect">
+            <a:avLst/>
+          </a:prstGeom>
+          <a:noFill/>
+          <a:ln w="9525">
+            <a:solidFill>
+              <a:srgbClr val="26231F"/>
+            </a:solidFill>
+          </a:ln>
+        </p:spPr>
+        <p:txBody>
+          <a:bodyPr rtlCol="0" anchor="ctr"/>
+          <a:lstStyle/>
+          <a:p>
+            <a:pPr algn="ctr"/>
+          </a:p>
+        </p:txBody>
+      </p:sp>
+      <p:sp>
+        <p:nvSpPr>
+          <p:cNvPr id="5" name="라벨"/>
+          <p:cNvSpPr txBox="1"/>
+          <p:nvPr/>
+        </p:nvSpPr>
+        <p:spPr>
+          <a:xfrm>
+            <a:off x="822960" y="2148840"/>
+            <a:ext cx="5608179" cy="274320"/>
+          </a:xfrm>
+          <a:prstGeom prst="rect">
+            <a:avLst/>
+          </a:prstGeom>
+          <a:noFill/>
+        </p:spPr>
+        <p:txBody>
+          <a:bodyPr wrap="square" lIns="54864" rIns="54864" tIns="27432" bIns="27432" anchor="t">
+            <a:noAutofit/>
+          </a:bodyPr>
+          <a:lstStyle/>
+          <a:p>
+            <a:pPr algn="l">
+              <a:lnSpc>
+                <a:spcPct val="115000"/>
+              </a:lnSpc>
+            </a:pPr>
+            <a:r>
+              <a:rPr sz="1000" b="1" i="0" spc="250">
+                <a:solidFill>
+                  <a:srgbClr val="26231F"/>
+                </a:solidFill>
+              </a:rPr>
+              <a:t>FAMILY ALBUM</a:t>
+            </a:r>
+          </a:p>
+        </p:txBody>
+      </p:sp>
       <p:sp>
         <p:nvSpPr>
           <p:cNvPr id="2" name="Title 1"/>
@@ -3329,8 +3423,8 @@
         </p:nvSpPr>
         <p:spPr>
           <a:xfrm>
-            <a:off x="853418" y="2057400"/>
-            <a:ext cx="6095847" cy="1554480"/>
+            <a:off x="822960" y="2606040"/>
+            <a:ext cx="5608179" cy="1188720"/>
           </a:xfrm>
         </p:spPr>
         <p:txBody>
@@ -3345,9 +3439,9 @@
               </a:lnSpc>
             </a:pPr>
             <a:r>
-              <a:rPr sz="3600" b="1" i="0">
-                <a:solidFill>
-                  <a:srgbClr val="37261A"/>
+              <a:rPr sz="4000" b="1" i="0">
+                <a:solidFill>
+                  <a:srgbClr val="26231F"/>
                 </a:solidFill>
               </a:rPr>
               <a:t>우리 가족을 소개합니다</a:t>
@@ -3357,14 +3451,14 @@
       </p:sp>
       <p:sp>
         <p:nvSpPr>
-          <p:cNvPr id="4" name="한 줄 문구"/>
+          <p:cNvPr id="6" name="한 줄 문구"/>
           <p:cNvSpPr txBox="1"/>
           <p:nvPr/>
         </p:nvSpPr>
         <p:spPr>
           <a:xfrm>
-            <a:off x="853418" y="3749039"/>
-            <a:ext cx="6095847" cy="822960"/>
+            <a:off x="822960" y="3886200"/>
+            <a:ext cx="5608179" cy="822960"/>
           </a:xfrm>
           <a:prstGeom prst="rect">
             <a:avLst/>
@@ -3383,9 +3477,9 @@
               </a:lnSpc>
             </a:pPr>
             <a:r>
-              <a:rPr sz="1700" b="0" i="1">
-                <a:solidFill>
-                  <a:srgbClr val="37261A"/>
+              <a:rPr sz="1700" b="0" i="0">
+                <a:solidFill>
+                  <a:srgbClr val="26231F"/>
                 </a:solidFill>
               </a:rPr>
               <a:t>아이 손 잡고 간 도서관</a:t>
@@ -3395,14 +3489,14 @@
       </p:sp>
       <p:sp>
         <p:nvSpPr>
-          <p:cNvPr id="5" name="안내 문구"/>
+          <p:cNvPr id="7" name="안내 문구"/>
           <p:cNvSpPr txBox="1"/>
           <p:nvPr/>
         </p:nvSpPr>
         <p:spPr>
           <a:xfrm>
-            <a:off x="853418" y="4617720"/>
-            <a:ext cx="6095847" cy="914400"/>
+            <a:off x="822960" y="4754880"/>
+            <a:ext cx="5608179" cy="914400"/>
           </a:xfrm>
           <a:prstGeom prst="rect">
             <a:avLst/>
@@ -3423,10 +3517,10 @@
             <a:r>
               <a:rPr sz="1400" b="0" i="0">
                 <a:solidFill>
-                  <a:srgbClr val="666666"/>
+                  <a:srgbClr val="26231F"/>
                 </a:solidFill>
               </a:rPr>
-              <a:t>아이와 함께 · 2027. 00. 00</a:t>
+              <a:t>아이와 함께 · 날짜 입력</a:t>
             </a:r>
           </a:p>
         </p:txBody>
@@ -3445,7 +3539,7 @@
     <p:bg>
       <p:bgPr>
         <a:solidFill>
-          <a:srgbClr val="FFFFFF"/>
+          <a:srgbClr val="FBF2EC"/>
         </a:solidFill>
         <a:effectLst/>
       </p:bgPr>
@@ -3459,20 +3553,20 @@
       <p:grpSpPr/>
       <p:sp>
         <p:nvSpPr>
-          <p:cNvPr id="3" name="장식"/>
+          <p:cNvPr id="3" name="포인트"/>
           <p:cNvSpPr/>
           <p:nvPr/>
         </p:nvSpPr>
         <p:spPr>
-          <a:xfrm>
-            <a:off x="0" y="384048"/>
-            <a:ext cx="9509522" cy="896112"/>
-          </a:xfrm>
-          <a:prstGeom prst="homePlate">
+          <a:xfrm rot="18900000">
+            <a:off x="5958687" y="246888"/>
+            <a:ext cx="274320" cy="274320"/>
+          </a:xfrm>
+          <a:prstGeom prst="teardrop">
             <a:avLst/>
           </a:prstGeom>
           <a:solidFill>
-            <a:srgbClr val="765037"/>
+            <a:srgbClr val="D89F79"/>
           </a:solidFill>
           <a:ln>
             <a:noFill/>
@@ -3488,19 +3582,48 @@
       </p:sp>
       <p:sp>
         <p:nvSpPr>
-          <p:cNvPr id="2" name="Title 1"/>
-          <p:cNvSpPr>
-            <a:spLocks noGrp="1"/>
-          </p:cNvSpPr>
-          <p:nvPr>
-            <p:ph type="title"/>
-          </p:nvPr>
-        </p:nvSpPr>
-        <p:spPr>
-          <a:xfrm>
-            <a:off x="640080" y="411480"/>
-            <a:ext cx="8412242" cy="822960"/>
-          </a:xfrm>
+          <p:cNvPr id="4" name="장식"/>
+          <p:cNvSpPr/>
+          <p:nvPr/>
+        </p:nvSpPr>
+        <p:spPr>
+          <a:xfrm>
+            <a:off x="5684367" y="1572768"/>
+            <a:ext cx="822960" cy="22860"/>
+          </a:xfrm>
+          <a:prstGeom prst="rect">
+            <a:avLst/>
+          </a:prstGeom>
+          <a:solidFill>
+            <a:srgbClr val="D89F79"/>
+          </a:solidFill>
+          <a:ln>
+            <a:noFill/>
+          </a:ln>
+        </p:spPr>
+        <p:txBody>
+          <a:bodyPr rtlCol="0" anchor="ctr"/>
+          <a:lstStyle/>
+          <a:p>
+            <a:pPr algn="ctr"/>
+          </a:p>
+        </p:txBody>
+      </p:sp>
+      <p:sp>
+        <p:nvSpPr>
+          <p:cNvPr id="5" name="상단 라벨"/>
+          <p:cNvSpPr txBox="1"/>
+          <p:nvPr/>
+        </p:nvSpPr>
+        <p:spPr>
+          <a:xfrm>
+            <a:off x="640080" y="182880"/>
+            <a:ext cx="3657600" cy="274320"/>
+          </a:xfrm>
+          <a:prstGeom prst="rect">
+            <a:avLst/>
+          </a:prstGeom>
+          <a:noFill/>
         </p:spPr>
         <p:txBody>
           <a:bodyPr wrap="square" lIns="54864" rIns="54864" tIns="27432" bIns="27432" anchor="ctr">
@@ -3509,6 +3632,44 @@
           <a:lstStyle/>
           <a:p>
             <a:pPr algn="l">
+              <a:lnSpc>
+                <a:spcPct val="115000"/>
+              </a:lnSpc>
+            </a:pPr>
+            <a:r>
+              <a:rPr sz="800" b="1" i="0" spc="250">
+                <a:solidFill>
+                  <a:srgbClr val="8E8780"/>
+                </a:solidFill>
+              </a:rPr>
+              <a:t>FAMILY ALBUM</a:t>
+            </a:r>
+          </a:p>
+        </p:txBody>
+      </p:sp>
+      <p:sp>
+        <p:nvSpPr>
+          <p:cNvPr id="2" name="Title 1"/>
+          <p:cNvSpPr>
+            <a:spLocks noGrp="1"/>
+          </p:cNvSpPr>
+          <p:nvPr>
+            <p:ph type="title"/>
+          </p:nvPr>
+        </p:nvSpPr>
+        <p:spPr>
+          <a:xfrm>
+            <a:off x="1371600" y="640080"/>
+            <a:ext cx="9448495" cy="868680"/>
+          </a:xfrm>
+        </p:spPr>
+        <p:txBody>
+          <a:bodyPr wrap="square" lIns="54864" rIns="54864" tIns="27432" bIns="27432" anchor="ctr">
+            <a:noAutofit/>
+          </a:bodyPr>
+          <a:lstStyle/>
+          <a:p>
+            <a:pPr algn="ctr">
               <a:lnSpc>
                 <a:spcPct val="105000"/>
               </a:lnSpc>
@@ -3516,7 +3677,7 @@
             <a:r>
               <a:rPr sz="3000" b="1" i="0">
                 <a:solidFill>
-                  <a:srgbClr val="FFFFFF"/>
+                  <a:srgbClr val="26231F"/>
                 </a:solidFill>
               </a:rPr>
               <a:t>가족 구성원</a:t>
@@ -3526,25 +3687,23 @@
       </p:sp>
       <p:sp>
         <p:nvSpPr>
-          <p:cNvPr id="4" name="사진 자리"/>
+          <p:cNvPr id="6" name="사진 자리"/>
           <p:cNvSpPr/>
           <p:nvPr/>
         </p:nvSpPr>
         <p:spPr>
           <a:xfrm>
-            <a:off x="777239" y="1645920"/>
+            <a:off x="777239" y="1783080"/>
             <a:ext cx="2282113" cy="2282113"/>
           </a:xfrm>
           <a:prstGeom prst="ellipse">
             <a:avLst/>
           </a:prstGeom>
           <a:solidFill>
-            <a:srgbClr val="EDDED4"/>
+            <a:srgbClr val="F6E2D5"/>
           </a:solidFill>
           <a:ln w="19050">
-            <a:solidFill>
-              <a:srgbClr val="765037"/>
-            </a:solidFill>
+            <a:noFill/>
             <a:prstDash val="dash"/>
           </a:ln>
         </p:spPr>
@@ -3562,7 +3721,7 @@
             <a:r>
               <a:rPr sz="1200" b="0" i="0">
                 <a:solidFill>
-                  <a:srgbClr val="37261A"/>
+                  <a:srgbClr val="8E8780"/>
                 </a:solidFill>
               </a:rPr>
               <a:t>사진</a:t>
@@ -3572,13 +3731,13 @@
       </p:sp>
       <p:sp>
         <p:nvSpPr>
-          <p:cNvPr id="5" name="TextBox 4"/>
+          <p:cNvPr id="7" name="TextBox 6"/>
           <p:cNvSpPr txBox="1"/>
           <p:nvPr/>
         </p:nvSpPr>
         <p:spPr>
           <a:xfrm>
-            <a:off x="640080" y="4019473"/>
+            <a:off x="640080" y="4156633"/>
             <a:ext cx="2556433" cy="411480"/>
           </a:xfrm>
           <a:prstGeom prst="rect">
@@ -3600,7 +3759,7 @@
             <a:r>
               <a:rPr sz="1600" b="1" i="0">
                 <a:solidFill>
-                  <a:srgbClr val="37261A"/>
+                  <a:srgbClr val="493527"/>
                 </a:solidFill>
               </a:rPr>
               <a:t>아빠</a:t>
@@ -3610,14 +3769,14 @@
       </p:sp>
       <p:sp>
         <p:nvSpPr>
-          <p:cNvPr id="6" name="TextBox 5"/>
+          <p:cNvPr id="8" name="TextBox 7"/>
           <p:cNvSpPr txBox="1"/>
           <p:nvPr/>
         </p:nvSpPr>
         <p:spPr>
           <a:xfrm>
-            <a:off x="731519" y="4476673"/>
-            <a:ext cx="2373553" cy="1924126"/>
+            <a:off x="731519" y="4613833"/>
+            <a:ext cx="2373553" cy="1741246"/>
           </a:xfrm>
           <a:prstGeom prst="rect">
             <a:avLst/>
@@ -3678,25 +3837,23 @@
       </p:sp>
       <p:sp>
         <p:nvSpPr>
-          <p:cNvPr id="7" name="사진 자리"/>
+          <p:cNvPr id="9" name="사진 자리"/>
           <p:cNvSpPr/>
           <p:nvPr/>
         </p:nvSpPr>
         <p:spPr>
           <a:xfrm>
-            <a:off x="3562273" y="1645920"/>
+            <a:off x="3562273" y="1783080"/>
             <a:ext cx="2282113" cy="2282113"/>
           </a:xfrm>
           <a:prstGeom prst="ellipse">
             <a:avLst/>
           </a:prstGeom>
           <a:solidFill>
-            <a:srgbClr val="EDDED4"/>
+            <a:srgbClr val="F6E2D5"/>
           </a:solidFill>
           <a:ln w="19050">
-            <a:solidFill>
-              <a:srgbClr val="765037"/>
-            </a:solidFill>
+            <a:noFill/>
             <a:prstDash val="dash"/>
           </a:ln>
         </p:spPr>
@@ -3714,7 +3871,7 @@
             <a:r>
               <a:rPr sz="1200" b="0" i="0">
                 <a:solidFill>
-                  <a:srgbClr val="37261A"/>
+                  <a:srgbClr val="8E8780"/>
                 </a:solidFill>
               </a:rPr>
               <a:t>사진</a:t>
@@ -3724,13 +3881,13 @@
       </p:sp>
       <p:sp>
         <p:nvSpPr>
-          <p:cNvPr id="8" name="TextBox 7"/>
+          <p:cNvPr id="10" name="TextBox 9"/>
           <p:cNvSpPr txBox="1"/>
           <p:nvPr/>
         </p:nvSpPr>
         <p:spPr>
           <a:xfrm>
-            <a:off x="3425113" y="4019473"/>
+            <a:off x="3425113" y="4156633"/>
             <a:ext cx="2556433" cy="411480"/>
           </a:xfrm>
           <a:prstGeom prst="rect">
@@ -3752,7 +3909,7 @@
             <a:r>
               <a:rPr sz="1600" b="1" i="0">
                 <a:solidFill>
-                  <a:srgbClr val="37261A"/>
+                  <a:srgbClr val="493527"/>
                 </a:solidFill>
               </a:rPr>
               <a:t>엄마</a:t>
@@ -3762,14 +3919,14 @@
       </p:sp>
       <p:sp>
         <p:nvSpPr>
-          <p:cNvPr id="9" name="TextBox 8"/>
+          <p:cNvPr id="11" name="TextBox 10"/>
           <p:cNvSpPr txBox="1"/>
           <p:nvPr/>
         </p:nvSpPr>
         <p:spPr>
           <a:xfrm>
-            <a:off x="3516553" y="4476673"/>
-            <a:ext cx="2373553" cy="1924126"/>
+            <a:off x="3516553" y="4613833"/>
+            <a:ext cx="2373553" cy="1741246"/>
           </a:xfrm>
           <a:prstGeom prst="rect">
             <a:avLst/>
@@ -3830,25 +3987,23 @@
       </p:sp>
       <p:sp>
         <p:nvSpPr>
-          <p:cNvPr id="10" name="사진 자리"/>
+          <p:cNvPr id="12" name="사진 자리"/>
           <p:cNvSpPr/>
           <p:nvPr/>
         </p:nvSpPr>
         <p:spPr>
           <a:xfrm>
-            <a:off x="6347307" y="1645920"/>
+            <a:off x="6347307" y="1783080"/>
             <a:ext cx="2282113" cy="2282113"/>
           </a:xfrm>
           <a:prstGeom prst="ellipse">
             <a:avLst/>
           </a:prstGeom>
           <a:solidFill>
-            <a:srgbClr val="EDDED4"/>
+            <a:srgbClr val="F6E2D5"/>
           </a:solidFill>
           <a:ln w="19050">
-            <a:solidFill>
-              <a:srgbClr val="765037"/>
-            </a:solidFill>
+            <a:noFill/>
             <a:prstDash val="dash"/>
           </a:ln>
         </p:spPr>
@@ -3866,7 +4021,7 @@
             <a:r>
               <a:rPr sz="1200" b="0" i="0">
                 <a:solidFill>
-                  <a:srgbClr val="37261A"/>
+                  <a:srgbClr val="8E8780"/>
                 </a:solidFill>
               </a:rPr>
               <a:t>사진</a:t>
@@ -3876,13 +4031,13 @@
       </p:sp>
       <p:sp>
         <p:nvSpPr>
-          <p:cNvPr id="11" name="TextBox 10"/>
+          <p:cNvPr id="13" name="TextBox 12"/>
           <p:cNvSpPr txBox="1"/>
           <p:nvPr/>
         </p:nvSpPr>
         <p:spPr>
           <a:xfrm>
-            <a:off x="6210147" y="4019473"/>
+            <a:off x="6210147" y="4156633"/>
             <a:ext cx="2556433" cy="411480"/>
           </a:xfrm>
           <a:prstGeom prst="rect">
@@ -3904,7 +4059,7 @@
             <a:r>
               <a:rPr sz="1600" b="1" i="0">
                 <a:solidFill>
-                  <a:srgbClr val="37261A"/>
+                  <a:srgbClr val="493527"/>
                 </a:solidFill>
               </a:rPr>
               <a:t>첫째</a:t>
@@ -3914,14 +4069,14 @@
       </p:sp>
       <p:sp>
         <p:nvSpPr>
-          <p:cNvPr id="12" name="TextBox 11"/>
+          <p:cNvPr id="14" name="TextBox 13"/>
           <p:cNvSpPr txBox="1"/>
           <p:nvPr/>
         </p:nvSpPr>
         <p:spPr>
           <a:xfrm>
-            <a:off x="6301587" y="4476673"/>
-            <a:ext cx="2373553" cy="1924126"/>
+            <a:off x="6301587" y="4613833"/>
+            <a:ext cx="2373553" cy="1741246"/>
           </a:xfrm>
           <a:prstGeom prst="rect">
             <a:avLst/>
@@ -3982,25 +4137,23 @@
       </p:sp>
       <p:sp>
         <p:nvSpPr>
-          <p:cNvPr id="13" name="사진 자리"/>
+          <p:cNvPr id="15" name="사진 자리"/>
           <p:cNvSpPr/>
           <p:nvPr/>
         </p:nvSpPr>
         <p:spPr>
           <a:xfrm>
-            <a:off x="9132341" y="1645920"/>
+            <a:off x="9132341" y="1783080"/>
             <a:ext cx="2282113" cy="2282113"/>
           </a:xfrm>
           <a:prstGeom prst="ellipse">
             <a:avLst/>
           </a:prstGeom>
           <a:solidFill>
-            <a:srgbClr val="EDDED4"/>
+            <a:srgbClr val="F6E2D5"/>
           </a:solidFill>
           <a:ln w="19050">
-            <a:solidFill>
-              <a:srgbClr val="765037"/>
-            </a:solidFill>
+            <a:noFill/>
             <a:prstDash val="dash"/>
           </a:ln>
         </p:spPr>
@@ -4018,7 +4171,7 @@
             <a:r>
               <a:rPr sz="1200" b="0" i="0">
                 <a:solidFill>
-                  <a:srgbClr val="37261A"/>
+                  <a:srgbClr val="8E8780"/>
                 </a:solidFill>
               </a:rPr>
               <a:t>사진</a:t>
@@ -4028,13 +4181,13 @@
       </p:sp>
       <p:sp>
         <p:nvSpPr>
-          <p:cNvPr id="14" name="TextBox 13"/>
+          <p:cNvPr id="16" name="TextBox 15"/>
           <p:cNvSpPr txBox="1"/>
           <p:nvPr/>
         </p:nvSpPr>
         <p:spPr>
           <a:xfrm>
-            <a:off x="8995181" y="4019473"/>
+            <a:off x="8995181" y="4156633"/>
             <a:ext cx="2556433" cy="411480"/>
           </a:xfrm>
           <a:prstGeom prst="rect">
@@ -4056,7 +4209,7 @@
             <a:r>
               <a:rPr sz="1600" b="1" i="0">
                 <a:solidFill>
-                  <a:srgbClr val="37261A"/>
+                  <a:srgbClr val="493527"/>
                 </a:solidFill>
               </a:rPr>
               <a:t>둘째</a:t>
@@ -4066,14 +4219,14 @@
       </p:sp>
       <p:sp>
         <p:nvSpPr>
-          <p:cNvPr id="15" name="TextBox 14"/>
+          <p:cNvPr id="17" name="TextBox 16"/>
           <p:cNvSpPr txBox="1"/>
           <p:nvPr/>
         </p:nvSpPr>
         <p:spPr>
           <a:xfrm>
-            <a:off x="9086621" y="4476673"/>
-            <a:ext cx="2373553" cy="1924126"/>
+            <a:off x="9086621" y="4613833"/>
+            <a:ext cx="2373553" cy="1741246"/>
           </a:xfrm>
           <a:prstGeom prst="rect">
             <a:avLst/>
@@ -4146,7 +4299,7 @@
     <p:bg>
       <p:bgPr>
         <a:solidFill>
-          <a:srgbClr val="FFFFFF"/>
+          <a:srgbClr val="FBF2EC"/>
         </a:solidFill>
         <a:effectLst/>
       </p:bgPr>
@@ -4160,20 +4313,20 @@
       <p:grpSpPr/>
       <p:sp>
         <p:nvSpPr>
-          <p:cNvPr id="3" name="장식"/>
+          <p:cNvPr id="3" name="포인트"/>
           <p:cNvSpPr/>
           <p:nvPr/>
         </p:nvSpPr>
         <p:spPr>
-          <a:xfrm>
-            <a:off x="0" y="384048"/>
-            <a:ext cx="9509522" cy="896112"/>
-          </a:xfrm>
-          <a:prstGeom prst="homePlate">
+          <a:xfrm rot="18900000">
+            <a:off x="5958687" y="246888"/>
+            <a:ext cx="274320" cy="274320"/>
+          </a:xfrm>
+          <a:prstGeom prst="teardrop">
             <a:avLst/>
           </a:prstGeom>
           <a:solidFill>
-            <a:srgbClr val="765037"/>
+            <a:srgbClr val="D89F79"/>
           </a:solidFill>
           <a:ln>
             <a:noFill/>
@@ -4189,19 +4342,48 @@
       </p:sp>
       <p:sp>
         <p:nvSpPr>
-          <p:cNvPr id="2" name="Title 1"/>
-          <p:cNvSpPr>
-            <a:spLocks noGrp="1"/>
-          </p:cNvSpPr>
-          <p:nvPr>
-            <p:ph type="title"/>
-          </p:nvPr>
-        </p:nvSpPr>
-        <p:spPr>
-          <a:xfrm>
-            <a:off x="640080" y="411480"/>
-            <a:ext cx="8412242" cy="822960"/>
-          </a:xfrm>
+          <p:cNvPr id="4" name="장식"/>
+          <p:cNvSpPr/>
+          <p:nvPr/>
+        </p:nvSpPr>
+        <p:spPr>
+          <a:xfrm>
+            <a:off x="5684367" y="1572768"/>
+            <a:ext cx="822960" cy="22860"/>
+          </a:xfrm>
+          <a:prstGeom prst="rect">
+            <a:avLst/>
+          </a:prstGeom>
+          <a:solidFill>
+            <a:srgbClr val="D89F79"/>
+          </a:solidFill>
+          <a:ln>
+            <a:noFill/>
+          </a:ln>
+        </p:spPr>
+        <p:txBody>
+          <a:bodyPr rtlCol="0" anchor="ctr"/>
+          <a:lstStyle/>
+          <a:p>
+            <a:pPr algn="ctr"/>
+          </a:p>
+        </p:txBody>
+      </p:sp>
+      <p:sp>
+        <p:nvSpPr>
+          <p:cNvPr id="5" name="상단 라벨"/>
+          <p:cNvSpPr txBox="1"/>
+          <p:nvPr/>
+        </p:nvSpPr>
+        <p:spPr>
+          <a:xfrm>
+            <a:off x="640080" y="182880"/>
+            <a:ext cx="3657600" cy="274320"/>
+          </a:xfrm>
+          <a:prstGeom prst="rect">
+            <a:avLst/>
+          </a:prstGeom>
+          <a:noFill/>
         </p:spPr>
         <p:txBody>
           <a:bodyPr wrap="square" lIns="54864" rIns="54864" tIns="27432" bIns="27432" anchor="ctr">
@@ -4210,6 +4392,44 @@
           <a:lstStyle/>
           <a:p>
             <a:pPr algn="l">
+              <a:lnSpc>
+                <a:spcPct val="115000"/>
+              </a:lnSpc>
+            </a:pPr>
+            <a:r>
+              <a:rPr sz="800" b="1" i="0" spc="250">
+                <a:solidFill>
+                  <a:srgbClr val="8E8780"/>
+                </a:solidFill>
+              </a:rPr>
+              <a:t>FAMILY ALBUM</a:t>
+            </a:r>
+          </a:p>
+        </p:txBody>
+      </p:sp>
+      <p:sp>
+        <p:nvSpPr>
+          <p:cNvPr id="2" name="Title 1"/>
+          <p:cNvSpPr>
+            <a:spLocks noGrp="1"/>
+          </p:cNvSpPr>
+          <p:nvPr>
+            <p:ph type="title"/>
+          </p:nvPr>
+        </p:nvSpPr>
+        <p:spPr>
+          <a:xfrm>
+            <a:off x="1371600" y="640080"/>
+            <a:ext cx="9448495" cy="868680"/>
+          </a:xfrm>
+        </p:spPr>
+        <p:txBody>
+          <a:bodyPr wrap="square" lIns="54864" rIns="54864" tIns="27432" bIns="27432" anchor="ctr">
+            <a:noAutofit/>
+          </a:bodyPr>
+          <a:lstStyle/>
+          <a:p>
+            <a:pPr algn="ctr">
               <a:lnSpc>
                 <a:spcPct val="105000"/>
               </a:lnSpc>
@@ -4217,7 +4437,7 @@
             <a:r>
               <a:rPr sz="3000" b="1" i="0">
                 <a:solidFill>
-                  <a:srgbClr val="FFFFFF"/>
+                  <a:srgbClr val="26231F"/>
                 </a:solidFill>
               </a:rPr>
               <a:t>우리 가족 이야기</a:t>
@@ -4227,20 +4447,20 @@
       </p:sp>
       <p:sp>
         <p:nvSpPr>
-          <p:cNvPr id="4" name="타임라인 선"/>
+          <p:cNvPr id="6" name="타임라인 선"/>
           <p:cNvSpPr/>
           <p:nvPr/>
         </p:nvSpPr>
         <p:spPr>
           <a:xfrm>
-            <a:off x="640080" y="3383280"/>
+            <a:off x="640080" y="3520440"/>
             <a:ext cx="10911535" cy="54864"/>
           </a:xfrm>
           <a:prstGeom prst="rect">
             <a:avLst/>
           </a:prstGeom>
           <a:solidFill>
-            <a:srgbClr val="EDDED4"/>
+            <a:srgbClr val="F6E2D5"/>
           </a:solidFill>
           <a:ln>
             <a:noFill/>
@@ -4256,20 +4476,20 @@
       </p:sp>
       <p:sp>
         <p:nvSpPr>
-          <p:cNvPr id="5" name="때 1"/>
+          <p:cNvPr id="7" name="때 1"/>
           <p:cNvSpPr/>
           <p:nvPr/>
         </p:nvSpPr>
         <p:spPr>
           <a:xfrm>
-            <a:off x="1802853" y="3200400"/>
+            <a:off x="1802853" y="3337560"/>
             <a:ext cx="402336" cy="402336"/>
           </a:xfrm>
           <a:prstGeom prst="ellipse">
             <a:avLst/>
           </a:prstGeom>
           <a:solidFill>
-            <a:srgbClr val="765037"/>
+            <a:srgbClr val="D89F79"/>
           </a:solidFill>
           <a:ln w="38100">
             <a:solidFill>
@@ -4287,13 +4507,13 @@
       </p:sp>
       <p:sp>
         <p:nvSpPr>
-          <p:cNvPr id="6" name="TextBox 5"/>
+          <p:cNvPr id="8" name="TextBox 7"/>
           <p:cNvSpPr txBox="1"/>
           <p:nvPr/>
         </p:nvSpPr>
         <p:spPr>
           <a:xfrm>
-            <a:off x="685800" y="2560320"/>
+            <a:off x="685800" y="2697480"/>
             <a:ext cx="2636443" cy="457200"/>
           </a:xfrm>
           <a:prstGeom prst="rect">
@@ -4315,7 +4535,7 @@
             <a:r>
               <a:rPr sz="1600" b="1" i="0">
                 <a:solidFill>
-                  <a:srgbClr val="765037"/>
+                  <a:srgbClr val="D89F79"/>
                 </a:solidFill>
               </a:rPr>
               <a:t>가족이 된 날</a:t>
@@ -4325,13 +4545,13 @@
       </p:sp>
       <p:sp>
         <p:nvSpPr>
-          <p:cNvPr id="7" name="TextBox 6"/>
+          <p:cNvPr id="9" name="TextBox 8"/>
           <p:cNvSpPr txBox="1"/>
           <p:nvPr/>
         </p:nvSpPr>
         <p:spPr>
           <a:xfrm>
-            <a:off x="731519" y="3749039"/>
+            <a:off x="731519" y="3886200"/>
             <a:ext cx="2545003" cy="457200"/>
           </a:xfrm>
           <a:prstGeom prst="rect">
@@ -4353,7 +4573,7 @@
             <a:r>
               <a:rPr sz="1800" b="1" i="0">
                 <a:solidFill>
-                  <a:srgbClr val="37261A"/>
+                  <a:srgbClr val="493527"/>
                 </a:solidFill>
               </a:rPr>
               <a:t>우리의 시작</a:t>
@@ -4363,13 +4583,13 @@
       </p:sp>
       <p:sp>
         <p:nvSpPr>
-          <p:cNvPr id="8" name="TextBox 7"/>
+          <p:cNvPr id="10" name="TextBox 9"/>
           <p:cNvSpPr txBox="1"/>
           <p:nvPr/>
         </p:nvSpPr>
         <p:spPr>
           <a:xfrm>
-            <a:off x="731519" y="4251960"/>
+            <a:off x="731519" y="4389120"/>
             <a:ext cx="2545003" cy="1645920"/>
           </a:xfrm>
           <a:prstGeom prst="rect">
@@ -4391,7 +4611,7 @@
             <a:r>
               <a:rPr sz="1500" b="0" i="0">
                 <a:solidFill>
-                  <a:srgbClr val="2B2B2B"/>
+                  <a:srgbClr val="26231F"/>
                 </a:solidFill>
               </a:rPr>
               <a:t>처음 만난 날의 이야기</a:t>
@@ -4401,20 +4621,20 @@
       </p:sp>
       <p:sp>
         <p:nvSpPr>
-          <p:cNvPr id="9" name="때 2"/>
+          <p:cNvPr id="11" name="때 2"/>
           <p:cNvSpPr/>
           <p:nvPr/>
         </p:nvSpPr>
         <p:spPr>
           <a:xfrm>
-            <a:off x="4530737" y="3200400"/>
+            <a:off x="4530737" y="3337560"/>
             <a:ext cx="402336" cy="402336"/>
           </a:xfrm>
           <a:prstGeom prst="ellipse">
             <a:avLst/>
           </a:prstGeom>
           <a:solidFill>
-            <a:srgbClr val="765037"/>
+            <a:srgbClr val="D89F79"/>
           </a:solidFill>
           <a:ln w="38100">
             <a:solidFill>
@@ -4432,13 +4652,13 @@
       </p:sp>
       <p:sp>
         <p:nvSpPr>
-          <p:cNvPr id="10" name="TextBox 9"/>
+          <p:cNvPr id="12" name="TextBox 11"/>
           <p:cNvSpPr txBox="1"/>
           <p:nvPr/>
         </p:nvSpPr>
         <p:spPr>
           <a:xfrm>
-            <a:off x="3413683" y="2560320"/>
+            <a:off x="3413683" y="2697480"/>
             <a:ext cx="2636443" cy="457200"/>
           </a:xfrm>
           <a:prstGeom prst="rect">
@@ -4460,7 +4680,7 @@
             <a:r>
               <a:rPr sz="1600" b="1" i="0">
                 <a:solidFill>
-                  <a:srgbClr val="765037"/>
+                  <a:srgbClr val="D89F79"/>
                 </a:solidFill>
               </a:rPr>
               <a:t>아이가 태어난 날</a:t>
@@ -4470,13 +4690,13 @@
       </p:sp>
       <p:sp>
         <p:nvSpPr>
-          <p:cNvPr id="11" name="TextBox 10"/>
+          <p:cNvPr id="13" name="TextBox 12"/>
           <p:cNvSpPr txBox="1"/>
           <p:nvPr/>
         </p:nvSpPr>
         <p:spPr>
           <a:xfrm>
-            <a:off x="3459403" y="3749039"/>
+            <a:off x="3459403" y="3886200"/>
             <a:ext cx="2545003" cy="457200"/>
           </a:xfrm>
           <a:prstGeom prst="rect">
@@ -4498,7 +4718,7 @@
             <a:r>
               <a:rPr sz="1800" b="1" i="0">
                 <a:solidFill>
-                  <a:srgbClr val="37261A"/>
+                  <a:srgbClr val="493527"/>
                 </a:solidFill>
               </a:rPr>
               <a:t>새 식구</a:t>
@@ -4508,13 +4728,13 @@
       </p:sp>
       <p:sp>
         <p:nvSpPr>
-          <p:cNvPr id="12" name="TextBox 11"/>
+          <p:cNvPr id="14" name="TextBox 13"/>
           <p:cNvSpPr txBox="1"/>
           <p:nvPr/>
         </p:nvSpPr>
         <p:spPr>
           <a:xfrm>
-            <a:off x="3459403" y="4251960"/>
+            <a:off x="3459403" y="4389120"/>
             <a:ext cx="2545003" cy="1645920"/>
           </a:xfrm>
           <a:prstGeom prst="rect">
@@ -4536,7 +4756,7 @@
             <a:r>
               <a:rPr sz="1500" b="0" i="0">
                 <a:solidFill>
-                  <a:srgbClr val="2B2B2B"/>
+                  <a:srgbClr val="26231F"/>
                 </a:solidFill>
               </a:rPr>
               <a:t>그날의 기억을 적어요</a:t>
@@ -4546,20 +4766,20 @@
       </p:sp>
       <p:sp>
         <p:nvSpPr>
-          <p:cNvPr id="13" name="때 3"/>
+          <p:cNvPr id="15" name="때 3"/>
           <p:cNvSpPr/>
           <p:nvPr/>
         </p:nvSpPr>
         <p:spPr>
           <a:xfrm>
-            <a:off x="7258621" y="3200400"/>
+            <a:off x="7258621" y="3337560"/>
             <a:ext cx="402336" cy="402336"/>
           </a:xfrm>
           <a:prstGeom prst="ellipse">
             <a:avLst/>
           </a:prstGeom>
           <a:solidFill>
-            <a:srgbClr val="765037"/>
+            <a:srgbClr val="D89F79"/>
           </a:solidFill>
           <a:ln w="38100">
             <a:solidFill>
@@ -4577,13 +4797,13 @@
       </p:sp>
       <p:sp>
         <p:nvSpPr>
-          <p:cNvPr id="14" name="TextBox 13"/>
+          <p:cNvPr id="16" name="TextBox 15"/>
           <p:cNvSpPr txBox="1"/>
           <p:nvPr/>
         </p:nvSpPr>
         <p:spPr>
           <a:xfrm>
-            <a:off x="6141567" y="2560320"/>
+            <a:off x="6141567" y="2697480"/>
             <a:ext cx="2636443" cy="457200"/>
           </a:xfrm>
           <a:prstGeom prst="rect">
@@ -4605,7 +4825,7 @@
             <a:r>
               <a:rPr sz="1600" b="1" i="0">
                 <a:solidFill>
-                  <a:srgbClr val="765037"/>
+                  <a:srgbClr val="D89F79"/>
                 </a:solidFill>
               </a:rPr>
               <a:t>첫 가족 여행</a:t>
@@ -4615,13 +4835,13 @@
       </p:sp>
       <p:sp>
         <p:nvSpPr>
-          <p:cNvPr id="15" name="TextBox 14"/>
+          <p:cNvPr id="17" name="TextBox 16"/>
           <p:cNvSpPr txBox="1"/>
           <p:nvPr/>
         </p:nvSpPr>
         <p:spPr>
           <a:xfrm>
-            <a:off x="6187287" y="3749039"/>
+            <a:off x="6187287" y="3886200"/>
             <a:ext cx="2545003" cy="457200"/>
           </a:xfrm>
           <a:prstGeom prst="rect">
@@ -4643,7 +4863,7 @@
             <a:r>
               <a:rPr sz="1800" b="1" i="0">
                 <a:solidFill>
-                  <a:srgbClr val="37261A"/>
+                  <a:srgbClr val="493527"/>
                 </a:solidFill>
               </a:rPr>
               <a:t>함께 떠난 길</a:t>
@@ -4653,13 +4873,13 @@
       </p:sp>
       <p:sp>
         <p:nvSpPr>
-          <p:cNvPr id="16" name="TextBox 15"/>
+          <p:cNvPr id="18" name="TextBox 17"/>
           <p:cNvSpPr txBox="1"/>
           <p:nvPr/>
         </p:nvSpPr>
         <p:spPr>
           <a:xfrm>
-            <a:off x="6187287" y="4251960"/>
+            <a:off x="6187287" y="4389120"/>
             <a:ext cx="2545003" cy="1645920"/>
           </a:xfrm>
           <a:prstGeom prst="rect">
@@ -4681,7 +4901,7 @@
             <a:r>
               <a:rPr sz="1500" b="0" i="0">
                 <a:solidFill>
-                  <a:srgbClr val="2B2B2B"/>
+                  <a:srgbClr val="26231F"/>
                 </a:solidFill>
               </a:rPr>
               <a:t>가장 웃었던 순간</a:t>
@@ -4691,20 +4911,20 @@
       </p:sp>
       <p:sp>
         <p:nvSpPr>
-          <p:cNvPr id="17" name="때 4"/>
+          <p:cNvPr id="19" name="때 4"/>
           <p:cNvSpPr/>
           <p:nvPr/>
         </p:nvSpPr>
         <p:spPr>
           <a:xfrm>
-            <a:off x="9986505" y="3200400"/>
+            <a:off x="9986505" y="3337560"/>
             <a:ext cx="402336" cy="402336"/>
           </a:xfrm>
           <a:prstGeom prst="ellipse">
             <a:avLst/>
           </a:prstGeom>
           <a:solidFill>
-            <a:srgbClr val="765037"/>
+            <a:srgbClr val="D89F79"/>
           </a:solidFill>
           <a:ln w="38100">
             <a:solidFill>
@@ -4722,13 +4942,13 @@
       </p:sp>
       <p:sp>
         <p:nvSpPr>
-          <p:cNvPr id="18" name="TextBox 17"/>
+          <p:cNvPr id="20" name="TextBox 19"/>
           <p:cNvSpPr txBox="1"/>
           <p:nvPr/>
         </p:nvSpPr>
         <p:spPr>
           <a:xfrm>
-            <a:off x="8869451" y="2560320"/>
+            <a:off x="8869451" y="2697480"/>
             <a:ext cx="2636443" cy="457200"/>
           </a:xfrm>
           <a:prstGeom prst="rect">
@@ -4750,7 +4970,7 @@
             <a:r>
               <a:rPr sz="1600" b="1" i="0">
                 <a:solidFill>
-                  <a:srgbClr val="765037"/>
+                  <a:srgbClr val="D89F79"/>
                 </a:solidFill>
               </a:rPr>
               <a:t>지금</a:t>
@@ -4760,13 +4980,13 @@
       </p:sp>
       <p:sp>
         <p:nvSpPr>
-          <p:cNvPr id="19" name="TextBox 18"/>
+          <p:cNvPr id="21" name="TextBox 20"/>
           <p:cNvSpPr txBox="1"/>
           <p:nvPr/>
         </p:nvSpPr>
         <p:spPr>
           <a:xfrm>
-            <a:off x="8915171" y="3749039"/>
+            <a:off x="8915171" y="3886200"/>
             <a:ext cx="2545003" cy="457200"/>
           </a:xfrm>
           <a:prstGeom prst="rect">
@@ -4788,7 +5008,7 @@
             <a:r>
               <a:rPr sz="1800" b="1" i="0">
                 <a:solidFill>
-                  <a:srgbClr val="37261A"/>
+                  <a:srgbClr val="493527"/>
                 </a:solidFill>
               </a:rPr>
               <a:t>오늘의 우리</a:t>
@@ -4798,13 +5018,13 @@
       </p:sp>
       <p:sp>
         <p:nvSpPr>
-          <p:cNvPr id="20" name="TextBox 19"/>
+          <p:cNvPr id="22" name="TextBox 21"/>
           <p:cNvSpPr txBox="1"/>
           <p:nvPr/>
         </p:nvSpPr>
         <p:spPr>
           <a:xfrm>
-            <a:off x="8915171" y="4251960"/>
+            <a:off x="8915171" y="4389120"/>
             <a:ext cx="2545003" cy="1645920"/>
           </a:xfrm>
           <a:prstGeom prst="rect">
@@ -4826,7 +5046,7 @@
             <a:r>
               <a:rPr sz="1500" b="0" i="0">
                 <a:solidFill>
-                  <a:srgbClr val="2B2B2B"/>
+                  <a:srgbClr val="26231F"/>
                 </a:solidFill>
               </a:rPr>
               <a:t>요즘 우리 이야기</a:t>
@@ -4848,7 +5068,7 @@
     <p:bg>
       <p:bgPr>
         <a:solidFill>
-          <a:srgbClr val="FFFFFF"/>
+          <a:srgbClr val="FBF2EC"/>
         </a:solidFill>
         <a:effectLst/>
       </p:bgPr>
@@ -4862,20 +5082,20 @@
       <p:grpSpPr/>
       <p:sp>
         <p:nvSpPr>
-          <p:cNvPr id="3" name="장식"/>
+          <p:cNvPr id="3" name="포인트"/>
           <p:cNvSpPr/>
           <p:nvPr/>
         </p:nvSpPr>
         <p:spPr>
-          <a:xfrm>
-            <a:off x="0" y="384048"/>
-            <a:ext cx="9509522" cy="896112"/>
-          </a:xfrm>
-          <a:prstGeom prst="homePlate">
+          <a:xfrm rot="18900000">
+            <a:off x="5958687" y="246888"/>
+            <a:ext cx="274320" cy="274320"/>
+          </a:xfrm>
+          <a:prstGeom prst="teardrop">
             <a:avLst/>
           </a:prstGeom>
           <a:solidFill>
-            <a:srgbClr val="765037"/>
+            <a:srgbClr val="D89F79"/>
           </a:solidFill>
           <a:ln>
             <a:noFill/>
@@ -4891,128 +5111,43 @@
       </p:sp>
       <p:sp>
         <p:nvSpPr>
-          <p:cNvPr id="2" name="Title 1"/>
-          <p:cNvSpPr>
-            <a:spLocks noGrp="1"/>
-          </p:cNvSpPr>
-          <p:nvPr>
-            <p:ph type="title"/>
-          </p:nvPr>
-        </p:nvSpPr>
-        <p:spPr>
-          <a:xfrm>
-            <a:off x="640080" y="411480"/>
-            <a:ext cx="8412242" cy="822960"/>
-          </a:xfrm>
-        </p:spPr>
-        <p:txBody>
-          <a:bodyPr wrap="square" lIns="54864" rIns="54864" tIns="27432" bIns="27432" anchor="ctr">
-            <a:noAutofit/>
-          </a:bodyPr>
-          <a:lstStyle/>
-          <a:p>
-            <a:pPr algn="l">
-              <a:lnSpc>
-                <a:spcPct val="105000"/>
-              </a:lnSpc>
-            </a:pPr>
-            <a:r>
-              <a:rPr sz="3000" b="1" i="0">
-                <a:solidFill>
-                  <a:srgbClr val="FFFFFF"/>
-                </a:solidFill>
-              </a:rPr>
-              <a:t>우리 가족의 약속</a:t>
-            </a:r>
-          </a:p>
-        </p:txBody>
-      </p:sp>
-      <p:sp>
-        <p:nvSpPr>
-          <p:cNvPr id="4" name="줄 1"/>
+          <p:cNvPr id="4" name="장식"/>
           <p:cNvSpPr/>
           <p:nvPr/>
         </p:nvSpPr>
         <p:spPr>
           <a:xfrm>
-            <a:off x="640080" y="1645920"/>
-            <a:ext cx="10911535" cy="1005840"/>
-          </a:xfrm>
-          <a:prstGeom prst="roundRect">
-            <a:avLst>
-              <a:gd name="adj" fmla="val 8000"/>
-            </a:avLst>
+            <a:off x="5684367" y="1572768"/>
+            <a:ext cx="822960" cy="22860"/>
+          </a:xfrm>
+          <a:prstGeom prst="rect">
+            <a:avLst/>
           </a:prstGeom>
           <a:solidFill>
-            <a:srgbClr val="F8F4F1"/>
-          </a:solidFill>
-          <a:ln w="12700">
-            <a:solidFill>
-              <a:srgbClr val="EDDED4"/>
-            </a:solidFill>
-          </a:ln>
-        </p:spPr>
-        <p:txBody>
-          <a:bodyPr rtlCol="0" anchor="ctr"/>
-          <a:lstStyle/>
-          <a:p>
-            <a:pPr algn="ctr"/>
-          </a:p>
-        </p:txBody>
-      </p:sp>
-      <p:sp>
-        <p:nvSpPr>
-          <p:cNvPr id="5" name="번호 1"/>
-          <p:cNvSpPr/>
-          <p:nvPr/>
-        </p:nvSpPr>
-        <p:spPr>
-          <a:xfrm>
-            <a:off x="822959" y="1920240"/>
-            <a:ext cx="457200" cy="457200"/>
-          </a:xfrm>
-          <a:prstGeom prst="ellipse">
-            <a:avLst/>
-          </a:prstGeom>
-          <a:solidFill>
-            <a:srgbClr val="765037"/>
+            <a:srgbClr val="D89F79"/>
           </a:solidFill>
           <a:ln>
             <a:noFill/>
           </a:ln>
         </p:spPr>
         <p:txBody>
-          <a:bodyPr rtlCol="0" anchor="ctr" wrap="square" lIns="54864" rIns="54864" tIns="27432" bIns="27432">
-            <a:noAutofit/>
-          </a:bodyPr>
-          <a:lstStyle/>
-          <a:p>
-            <a:pPr algn="ctr">
-              <a:lnSpc>
-                <a:spcPct val="100000"/>
-              </a:lnSpc>
-            </a:pPr>
-            <a:r>
-              <a:rPr sz="1600" b="1" i="0">
-                <a:solidFill>
-                  <a:srgbClr val="FFFFFF"/>
-                </a:solidFill>
-              </a:rPr>
-              <a:t>1</a:t>
-            </a:r>
-          </a:p>
-        </p:txBody>
-      </p:sp>
-      <p:sp>
-        <p:nvSpPr>
-          <p:cNvPr id="6" name="TextBox 5"/>
+          <a:bodyPr rtlCol="0" anchor="ctr"/>
+          <a:lstStyle/>
+          <a:p>
+            <a:pPr algn="ctr"/>
+          </a:p>
+        </p:txBody>
+      </p:sp>
+      <p:sp>
+        <p:nvSpPr>
+          <p:cNvPr id="5" name="상단 라벨"/>
           <p:cNvSpPr txBox="1"/>
           <p:nvPr/>
         </p:nvSpPr>
         <p:spPr>
           <a:xfrm>
-            <a:off x="1508760" y="1691640"/>
-            <a:ext cx="2743200" cy="914400"/>
+            <a:off x="640080" y="182880"/>
+            <a:ext cx="3657600" cy="274320"/>
           </a:xfrm>
           <a:prstGeom prst="rect">
             <a:avLst/>
@@ -5031,26 +5166,97 @@
               </a:lnSpc>
             </a:pPr>
             <a:r>
-              <a:rPr sz="1800" b="1" i="0">
-                <a:solidFill>
-                  <a:srgbClr val="37261A"/>
+              <a:rPr sz="800" b="1" i="0" spc="250">
+                <a:solidFill>
+                  <a:srgbClr val="8E8780"/>
                 </a:solidFill>
               </a:rPr>
-              <a:t>약속 1</a:t>
-            </a:r>
-          </a:p>
-        </p:txBody>
-      </p:sp>
-      <p:sp>
-        <p:nvSpPr>
-          <p:cNvPr id="7" name="TextBox 6"/>
+              <a:t>FAMILY ALBUM</a:t>
+            </a:r>
+          </a:p>
+        </p:txBody>
+      </p:sp>
+      <p:sp>
+        <p:nvSpPr>
+          <p:cNvPr id="2" name="Title 1"/>
+          <p:cNvSpPr>
+            <a:spLocks noGrp="1"/>
+          </p:cNvSpPr>
+          <p:nvPr>
+            <p:ph type="title"/>
+          </p:nvPr>
+        </p:nvSpPr>
+        <p:spPr>
+          <a:xfrm>
+            <a:off x="1371600" y="640080"/>
+            <a:ext cx="9448495" cy="868680"/>
+          </a:xfrm>
+        </p:spPr>
+        <p:txBody>
+          <a:bodyPr wrap="square" lIns="54864" rIns="54864" tIns="27432" bIns="27432" anchor="ctr">
+            <a:noAutofit/>
+          </a:bodyPr>
+          <a:lstStyle/>
+          <a:p>
+            <a:pPr algn="ctr">
+              <a:lnSpc>
+                <a:spcPct val="105000"/>
+              </a:lnSpc>
+            </a:pPr>
+            <a:r>
+              <a:rPr sz="3000" b="1" i="0">
+                <a:solidFill>
+                  <a:srgbClr val="26231F"/>
+                </a:solidFill>
+              </a:rPr>
+              <a:t>우리 가족의 약속</a:t>
+            </a:r>
+          </a:p>
+        </p:txBody>
+      </p:sp>
+      <p:sp>
+        <p:nvSpPr>
+          <p:cNvPr id="6" name="줄 1"/>
+          <p:cNvSpPr/>
+          <p:nvPr/>
+        </p:nvSpPr>
+        <p:spPr>
+          <a:xfrm>
+            <a:off x="640080" y="1783080"/>
+            <a:ext cx="10911535" cy="1005840"/>
+          </a:xfrm>
+          <a:prstGeom prst="roundRect">
+            <a:avLst>
+              <a:gd name="adj" fmla="val 7000"/>
+            </a:avLst>
+          </a:prstGeom>
+          <a:solidFill>
+            <a:srgbClr val="FFFFFF"/>
+          </a:solidFill>
+          <a:ln w="12700">
+            <a:solidFill>
+              <a:srgbClr val="EBC6AD"/>
+            </a:solidFill>
+          </a:ln>
+        </p:spPr>
+        <p:txBody>
+          <a:bodyPr rtlCol="0" anchor="ctr"/>
+          <a:lstStyle/>
+          <a:p>
+            <a:pPr algn="ctr"/>
+          </a:p>
+        </p:txBody>
+      </p:sp>
+      <p:sp>
+        <p:nvSpPr>
+          <p:cNvPr id="7" name="번호 1"/>
           <p:cNvSpPr txBox="1"/>
           <p:nvPr/>
         </p:nvSpPr>
         <p:spPr>
           <a:xfrm>
-            <a:off x="4297680" y="1691640"/>
-            <a:ext cx="7071055" cy="914400"/>
+            <a:off x="731519" y="2011680"/>
+            <a:ext cx="914400" cy="548640"/>
           </a:xfrm>
           <a:prstGeom prst="rect">
             <a:avLst/>
@@ -5069,101 +5275,25 @@
               </a:lnSpc>
             </a:pPr>
             <a:r>
-              <a:rPr sz="1700" b="0" i="0">
-                <a:solidFill>
-                  <a:srgbClr val="2B2B2B"/>
+              <a:rPr sz="2400" b="1" i="0">
+                <a:solidFill>
+                  <a:srgbClr val="D89F79"/>
                 </a:solidFill>
               </a:rPr>
-              <a:t>밥은 꼭 함께 먹기</a:t>
-            </a:r>
-          </a:p>
-        </p:txBody>
-      </p:sp>
-      <p:sp>
-        <p:nvSpPr>
-          <p:cNvPr id="8" name="줄 2"/>
-          <p:cNvSpPr/>
-          <p:nvPr/>
-        </p:nvSpPr>
-        <p:spPr>
-          <a:xfrm>
-            <a:off x="640080" y="2788920"/>
-            <a:ext cx="10911535" cy="1005840"/>
-          </a:xfrm>
-          <a:prstGeom prst="roundRect">
-            <a:avLst>
-              <a:gd name="adj" fmla="val 8000"/>
-            </a:avLst>
-          </a:prstGeom>
-          <a:solidFill>
-            <a:srgbClr val="F8F4F1"/>
-          </a:solidFill>
-          <a:ln w="12700">
-            <a:solidFill>
-              <a:srgbClr val="EDDED4"/>
-            </a:solidFill>
-          </a:ln>
-        </p:spPr>
-        <p:txBody>
-          <a:bodyPr rtlCol="0" anchor="ctr"/>
-          <a:lstStyle/>
-          <a:p>
-            <a:pPr algn="ctr"/>
-          </a:p>
-        </p:txBody>
-      </p:sp>
-      <p:sp>
-        <p:nvSpPr>
-          <p:cNvPr id="9" name="번호 2"/>
-          <p:cNvSpPr/>
-          <p:nvPr/>
-        </p:nvSpPr>
-        <p:spPr>
-          <a:xfrm>
-            <a:off x="822959" y="3063239"/>
-            <a:ext cx="457200" cy="457200"/>
-          </a:xfrm>
-          <a:prstGeom prst="ellipse">
-            <a:avLst/>
-          </a:prstGeom>
-          <a:solidFill>
-            <a:srgbClr val="765037"/>
-          </a:solidFill>
-          <a:ln>
-            <a:noFill/>
-          </a:ln>
-        </p:spPr>
-        <p:txBody>
-          <a:bodyPr rtlCol="0" anchor="ctr" wrap="square" lIns="54864" rIns="54864" tIns="27432" bIns="27432">
-            <a:noAutofit/>
-          </a:bodyPr>
-          <a:lstStyle/>
-          <a:p>
-            <a:pPr algn="ctr">
-              <a:lnSpc>
-                <a:spcPct val="100000"/>
-              </a:lnSpc>
-            </a:pPr>
-            <a:r>
-              <a:rPr sz="1600" b="1" i="0">
-                <a:solidFill>
-                  <a:srgbClr val="FFFFFF"/>
-                </a:solidFill>
-              </a:rPr>
-              <a:t>2</a:t>
-            </a:r>
-          </a:p>
-        </p:txBody>
-      </p:sp>
-      <p:sp>
-        <p:nvSpPr>
-          <p:cNvPr id="10" name="TextBox 9"/>
+              <a:t>01</a:t>
+            </a:r>
+          </a:p>
+        </p:txBody>
+      </p:sp>
+      <p:sp>
+        <p:nvSpPr>
+          <p:cNvPr id="8" name="TextBox 7"/>
           <p:cNvSpPr txBox="1"/>
           <p:nvPr/>
         </p:nvSpPr>
         <p:spPr>
           <a:xfrm>
-            <a:off x="1508760" y="2834639"/>
+            <a:off x="1508760" y="1828800"/>
             <a:ext cx="2743200" cy="914400"/>
           </a:xfrm>
           <a:prstGeom prst="rect">
@@ -5185,23 +5315,23 @@
             <a:r>
               <a:rPr sz="1800" b="1" i="0">
                 <a:solidFill>
-                  <a:srgbClr val="37261A"/>
+                  <a:srgbClr val="493527"/>
                 </a:solidFill>
               </a:rPr>
-              <a:t>약속 2</a:t>
-            </a:r>
-          </a:p>
-        </p:txBody>
-      </p:sp>
-      <p:sp>
-        <p:nvSpPr>
-          <p:cNvPr id="11" name="TextBox 10"/>
+              <a:t>약속 1</a:t>
+            </a:r>
+          </a:p>
+        </p:txBody>
+      </p:sp>
+      <p:sp>
+        <p:nvSpPr>
+          <p:cNvPr id="9" name="TextBox 8"/>
           <p:cNvSpPr txBox="1"/>
           <p:nvPr/>
         </p:nvSpPr>
         <p:spPr>
           <a:xfrm>
-            <a:off x="4297680" y="2834639"/>
+            <a:off x="4297680" y="1828800"/>
             <a:ext cx="7071055" cy="914400"/>
           </a:xfrm>
           <a:prstGeom prst="rect">
@@ -5223,36 +5353,36 @@
             <a:r>
               <a:rPr sz="1700" b="0" i="0">
                 <a:solidFill>
-                  <a:srgbClr val="2B2B2B"/>
+                  <a:srgbClr val="26231F"/>
                 </a:solidFill>
               </a:rPr>
-              <a:t>잠들기 전에 사랑한다고 말하기</a:t>
-            </a:r>
-          </a:p>
-        </p:txBody>
-      </p:sp>
-      <p:sp>
-        <p:nvSpPr>
-          <p:cNvPr id="12" name="줄 3"/>
+              <a:t>밥은 꼭 함께 먹기</a:t>
+            </a:r>
+          </a:p>
+        </p:txBody>
+      </p:sp>
+      <p:sp>
+        <p:nvSpPr>
+          <p:cNvPr id="10" name="줄 2"/>
           <p:cNvSpPr/>
           <p:nvPr/>
         </p:nvSpPr>
         <p:spPr>
           <a:xfrm>
-            <a:off x="640080" y="3931920"/>
+            <a:off x="640080" y="2926080"/>
             <a:ext cx="10911535" cy="1005840"/>
           </a:xfrm>
           <a:prstGeom prst="roundRect">
             <a:avLst>
-              <a:gd name="adj" fmla="val 8000"/>
+              <a:gd name="adj" fmla="val 7000"/>
             </a:avLst>
           </a:prstGeom>
           <a:solidFill>
-            <a:srgbClr val="F8F4F1"/>
+            <a:srgbClr val="FFFFFF"/>
           </a:solidFill>
           <a:ln w="12700">
             <a:solidFill>
-              <a:srgbClr val="EDDED4"/>
+              <a:srgbClr val="EBC6AD"/>
             </a:solidFill>
           </a:ln>
         </p:spPr>
@@ -5266,57 +5396,14 @@
       </p:sp>
       <p:sp>
         <p:nvSpPr>
-          <p:cNvPr id="13" name="번호 3"/>
-          <p:cNvSpPr/>
-          <p:nvPr/>
-        </p:nvSpPr>
-        <p:spPr>
-          <a:xfrm>
-            <a:off x="822959" y="4206240"/>
-            <a:ext cx="457200" cy="457200"/>
-          </a:xfrm>
-          <a:prstGeom prst="ellipse">
-            <a:avLst/>
-          </a:prstGeom>
-          <a:solidFill>
-            <a:srgbClr val="765037"/>
-          </a:solidFill>
-          <a:ln>
-            <a:noFill/>
-          </a:ln>
-        </p:spPr>
-        <p:txBody>
-          <a:bodyPr rtlCol="0" anchor="ctr" wrap="square" lIns="54864" rIns="54864" tIns="27432" bIns="27432">
-            <a:noAutofit/>
-          </a:bodyPr>
-          <a:lstStyle/>
-          <a:p>
-            <a:pPr algn="ctr">
-              <a:lnSpc>
-                <a:spcPct val="100000"/>
-              </a:lnSpc>
-            </a:pPr>
-            <a:r>
-              <a:rPr sz="1600" b="1" i="0">
-                <a:solidFill>
-                  <a:srgbClr val="FFFFFF"/>
-                </a:solidFill>
-              </a:rPr>
-              <a:t>3</a:t>
-            </a:r>
-          </a:p>
-        </p:txBody>
-      </p:sp>
-      <p:sp>
-        <p:nvSpPr>
-          <p:cNvPr id="14" name="TextBox 13"/>
+          <p:cNvPr id="11" name="번호 2"/>
           <p:cNvSpPr txBox="1"/>
           <p:nvPr/>
         </p:nvSpPr>
         <p:spPr>
           <a:xfrm>
-            <a:off x="1508760" y="3977639"/>
-            <a:ext cx="2743200" cy="914400"/>
+            <a:off x="731519" y="3154680"/>
+            <a:ext cx="914400" cy="548640"/>
           </a:xfrm>
           <a:prstGeom prst="rect">
             <a:avLst/>
@@ -5335,26 +5422,26 @@
               </a:lnSpc>
             </a:pPr>
             <a:r>
-              <a:rPr sz="1800" b="1" i="0">
-                <a:solidFill>
-                  <a:srgbClr val="37261A"/>
+              <a:rPr sz="2400" b="1" i="0">
+                <a:solidFill>
+                  <a:srgbClr val="D89F79"/>
                 </a:solidFill>
               </a:rPr>
-              <a:t>약속 3</a:t>
-            </a:r>
-          </a:p>
-        </p:txBody>
-      </p:sp>
-      <p:sp>
-        <p:nvSpPr>
-          <p:cNvPr id="15" name="TextBox 14"/>
+              <a:t>02</a:t>
+            </a:r>
+          </a:p>
+        </p:txBody>
+      </p:sp>
+      <p:sp>
+        <p:nvSpPr>
+          <p:cNvPr id="12" name="TextBox 11"/>
           <p:cNvSpPr txBox="1"/>
           <p:nvPr/>
         </p:nvSpPr>
         <p:spPr>
           <a:xfrm>
-            <a:off x="4297680" y="3977639"/>
-            <a:ext cx="7071055" cy="914400"/>
+            <a:off x="1508760" y="2971800"/>
+            <a:ext cx="2743200" cy="914400"/>
           </a:xfrm>
           <a:prstGeom prst="rect">
             <a:avLst/>
@@ -5373,9 +5460,194 @@
               </a:lnSpc>
             </a:pPr>
             <a:r>
+              <a:rPr sz="1800" b="1" i="0">
+                <a:solidFill>
+                  <a:srgbClr val="493527"/>
+                </a:solidFill>
+              </a:rPr>
+              <a:t>약속 2</a:t>
+            </a:r>
+          </a:p>
+        </p:txBody>
+      </p:sp>
+      <p:sp>
+        <p:nvSpPr>
+          <p:cNvPr id="13" name="TextBox 12"/>
+          <p:cNvSpPr txBox="1"/>
+          <p:nvPr/>
+        </p:nvSpPr>
+        <p:spPr>
+          <a:xfrm>
+            <a:off x="4297680" y="2971800"/>
+            <a:ext cx="7071055" cy="914400"/>
+          </a:xfrm>
+          <a:prstGeom prst="rect">
+            <a:avLst/>
+          </a:prstGeom>
+          <a:noFill/>
+        </p:spPr>
+        <p:txBody>
+          <a:bodyPr wrap="square" lIns="54864" rIns="54864" tIns="27432" bIns="27432" anchor="ctr">
+            <a:noAutofit/>
+          </a:bodyPr>
+          <a:lstStyle/>
+          <a:p>
+            <a:pPr algn="l">
+              <a:lnSpc>
+                <a:spcPct val="115000"/>
+              </a:lnSpc>
+            </a:pPr>
+            <a:r>
               <a:rPr sz="1700" b="0" i="0">
                 <a:solidFill>
-                  <a:srgbClr val="2B2B2B"/>
+                  <a:srgbClr val="26231F"/>
+                </a:solidFill>
+              </a:rPr>
+              <a:t>잠들기 전에 사랑한다고 말하기</a:t>
+            </a:r>
+          </a:p>
+        </p:txBody>
+      </p:sp>
+      <p:sp>
+        <p:nvSpPr>
+          <p:cNvPr id="14" name="줄 3"/>
+          <p:cNvSpPr/>
+          <p:nvPr/>
+        </p:nvSpPr>
+        <p:spPr>
+          <a:xfrm>
+            <a:off x="640080" y="4069080"/>
+            <a:ext cx="10911535" cy="1005840"/>
+          </a:xfrm>
+          <a:prstGeom prst="roundRect">
+            <a:avLst>
+              <a:gd name="adj" fmla="val 7000"/>
+            </a:avLst>
+          </a:prstGeom>
+          <a:solidFill>
+            <a:srgbClr val="FFFFFF"/>
+          </a:solidFill>
+          <a:ln w="12700">
+            <a:solidFill>
+              <a:srgbClr val="EBC6AD"/>
+            </a:solidFill>
+          </a:ln>
+        </p:spPr>
+        <p:txBody>
+          <a:bodyPr rtlCol="0" anchor="ctr"/>
+          <a:lstStyle/>
+          <a:p>
+            <a:pPr algn="ctr"/>
+          </a:p>
+        </p:txBody>
+      </p:sp>
+      <p:sp>
+        <p:nvSpPr>
+          <p:cNvPr id="15" name="번호 3"/>
+          <p:cNvSpPr txBox="1"/>
+          <p:nvPr/>
+        </p:nvSpPr>
+        <p:spPr>
+          <a:xfrm>
+            <a:off x="731519" y="4297680"/>
+            <a:ext cx="914400" cy="548640"/>
+          </a:xfrm>
+          <a:prstGeom prst="rect">
+            <a:avLst/>
+          </a:prstGeom>
+          <a:noFill/>
+        </p:spPr>
+        <p:txBody>
+          <a:bodyPr wrap="square" lIns="54864" rIns="54864" tIns="27432" bIns="27432" anchor="ctr">
+            <a:noAutofit/>
+          </a:bodyPr>
+          <a:lstStyle/>
+          <a:p>
+            <a:pPr algn="l">
+              <a:lnSpc>
+                <a:spcPct val="115000"/>
+              </a:lnSpc>
+            </a:pPr>
+            <a:r>
+              <a:rPr sz="2400" b="1" i="0">
+                <a:solidFill>
+                  <a:srgbClr val="D89F79"/>
+                </a:solidFill>
+              </a:rPr>
+              <a:t>03</a:t>
+            </a:r>
+          </a:p>
+        </p:txBody>
+      </p:sp>
+      <p:sp>
+        <p:nvSpPr>
+          <p:cNvPr id="16" name="TextBox 15"/>
+          <p:cNvSpPr txBox="1"/>
+          <p:nvPr/>
+        </p:nvSpPr>
+        <p:spPr>
+          <a:xfrm>
+            <a:off x="1508760" y="4114800"/>
+            <a:ext cx="2743200" cy="914400"/>
+          </a:xfrm>
+          <a:prstGeom prst="rect">
+            <a:avLst/>
+          </a:prstGeom>
+          <a:noFill/>
+        </p:spPr>
+        <p:txBody>
+          <a:bodyPr wrap="square" lIns="54864" rIns="54864" tIns="27432" bIns="27432" anchor="ctr">
+            <a:noAutofit/>
+          </a:bodyPr>
+          <a:lstStyle/>
+          <a:p>
+            <a:pPr algn="l">
+              <a:lnSpc>
+                <a:spcPct val="115000"/>
+              </a:lnSpc>
+            </a:pPr>
+            <a:r>
+              <a:rPr sz="1800" b="1" i="0">
+                <a:solidFill>
+                  <a:srgbClr val="493527"/>
+                </a:solidFill>
+              </a:rPr>
+              <a:t>약속 3</a:t>
+            </a:r>
+          </a:p>
+        </p:txBody>
+      </p:sp>
+      <p:sp>
+        <p:nvSpPr>
+          <p:cNvPr id="17" name="TextBox 16"/>
+          <p:cNvSpPr txBox="1"/>
+          <p:nvPr/>
+        </p:nvSpPr>
+        <p:spPr>
+          <a:xfrm>
+            <a:off x="4297680" y="4114800"/>
+            <a:ext cx="7071055" cy="914400"/>
+          </a:xfrm>
+          <a:prstGeom prst="rect">
+            <a:avLst/>
+          </a:prstGeom>
+          <a:noFill/>
+        </p:spPr>
+        <p:txBody>
+          <a:bodyPr wrap="square" lIns="54864" rIns="54864" tIns="27432" bIns="27432" anchor="ctr">
+            <a:noAutofit/>
+          </a:bodyPr>
+          <a:lstStyle/>
+          <a:p>
+            <a:pPr algn="l">
+              <a:lnSpc>
+                <a:spcPct val="115000"/>
+              </a:lnSpc>
+            </a:pPr>
+            <a:r>
+              <a:rPr sz="1700" b="0" i="0">
+                <a:solidFill>
+                  <a:srgbClr val="26231F"/>
                 </a:solidFill>
               </a:rPr>
               <a:t>주말에는 함께 산책하기</a:t>
@@ -5397,7 +5669,7 @@
     <p:bg>
       <p:bgPr>
         <a:solidFill>
-          <a:srgbClr val="FFFFFF"/>
+          <a:srgbClr val="FBF2EC"/>
         </a:solidFill>
         <a:effectLst/>
       </p:bgPr>
@@ -5411,20 +5683,20 @@
       <p:grpSpPr/>
       <p:sp>
         <p:nvSpPr>
-          <p:cNvPr id="3" name="장식"/>
+          <p:cNvPr id="3" name="포인트"/>
           <p:cNvSpPr/>
           <p:nvPr/>
         </p:nvSpPr>
         <p:spPr>
-          <a:xfrm>
-            <a:off x="0" y="384048"/>
-            <a:ext cx="9509522" cy="896112"/>
-          </a:xfrm>
-          <a:prstGeom prst="homePlate">
+          <a:xfrm rot="18900000">
+            <a:off x="5958687" y="246888"/>
+            <a:ext cx="274320" cy="274320"/>
+          </a:xfrm>
+          <a:prstGeom prst="teardrop">
             <a:avLst/>
           </a:prstGeom>
           <a:solidFill>
-            <a:srgbClr val="765037"/>
+            <a:srgbClr val="D89F79"/>
           </a:solidFill>
           <a:ln>
             <a:noFill/>
@@ -5440,19 +5712,48 @@
       </p:sp>
       <p:sp>
         <p:nvSpPr>
-          <p:cNvPr id="2" name="Title 1"/>
-          <p:cNvSpPr>
-            <a:spLocks noGrp="1"/>
-          </p:cNvSpPr>
-          <p:nvPr>
-            <p:ph type="title"/>
-          </p:nvPr>
-        </p:nvSpPr>
-        <p:spPr>
-          <a:xfrm>
-            <a:off x="640080" y="411480"/>
-            <a:ext cx="8412242" cy="822960"/>
-          </a:xfrm>
+          <p:cNvPr id="4" name="장식"/>
+          <p:cNvSpPr/>
+          <p:nvPr/>
+        </p:nvSpPr>
+        <p:spPr>
+          <a:xfrm>
+            <a:off x="5684367" y="1572768"/>
+            <a:ext cx="822960" cy="22860"/>
+          </a:xfrm>
+          <a:prstGeom prst="rect">
+            <a:avLst/>
+          </a:prstGeom>
+          <a:solidFill>
+            <a:srgbClr val="D89F79"/>
+          </a:solidFill>
+          <a:ln>
+            <a:noFill/>
+          </a:ln>
+        </p:spPr>
+        <p:txBody>
+          <a:bodyPr rtlCol="0" anchor="ctr"/>
+          <a:lstStyle/>
+          <a:p>
+            <a:pPr algn="ctr"/>
+          </a:p>
+        </p:txBody>
+      </p:sp>
+      <p:sp>
+        <p:nvSpPr>
+          <p:cNvPr id="5" name="상단 라벨"/>
+          <p:cNvSpPr txBox="1"/>
+          <p:nvPr/>
+        </p:nvSpPr>
+        <p:spPr>
+          <a:xfrm>
+            <a:off x="640080" y="182880"/>
+            <a:ext cx="3657600" cy="274320"/>
+          </a:xfrm>
+          <a:prstGeom prst="rect">
+            <a:avLst/>
+          </a:prstGeom>
+          <a:noFill/>
         </p:spPr>
         <p:txBody>
           <a:bodyPr wrap="square" lIns="54864" rIns="54864" tIns="27432" bIns="27432" anchor="ctr">
@@ -5461,6 +5762,44 @@
           <a:lstStyle/>
           <a:p>
             <a:pPr algn="l">
+              <a:lnSpc>
+                <a:spcPct val="115000"/>
+              </a:lnSpc>
+            </a:pPr>
+            <a:r>
+              <a:rPr sz="800" b="1" i="0" spc="250">
+                <a:solidFill>
+                  <a:srgbClr val="8E8780"/>
+                </a:solidFill>
+              </a:rPr>
+              <a:t>FAMILY ALBUM</a:t>
+            </a:r>
+          </a:p>
+        </p:txBody>
+      </p:sp>
+      <p:sp>
+        <p:nvSpPr>
+          <p:cNvPr id="2" name="Title 1"/>
+          <p:cNvSpPr>
+            <a:spLocks noGrp="1"/>
+          </p:cNvSpPr>
+          <p:nvPr>
+            <p:ph type="title"/>
+          </p:nvPr>
+        </p:nvSpPr>
+        <p:spPr>
+          <a:xfrm>
+            <a:off x="1371600" y="640080"/>
+            <a:ext cx="9448495" cy="868680"/>
+          </a:xfrm>
+        </p:spPr>
+        <p:txBody>
+          <a:bodyPr wrap="square" lIns="54864" rIns="54864" tIns="27432" bIns="27432" anchor="ctr">
+            <a:noAutofit/>
+          </a:bodyPr>
+          <a:lstStyle/>
+          <a:p>
+            <a:pPr algn="ctr">
               <a:lnSpc>
                 <a:spcPct val="105000"/>
               </a:lnSpc>
@@ -5468,7 +5807,7 @@
             <a:r>
               <a:rPr sz="3000" b="1" i="0">
                 <a:solidFill>
-                  <a:srgbClr val="FFFFFF"/>
+                  <a:srgbClr val="26231F"/>
                 </a:solidFill>
               </a:rPr>
               <a:t>가족 사진</a:t>
@@ -5478,14 +5817,14 @@
       </p:sp>
       <p:sp>
         <p:nvSpPr>
-          <p:cNvPr id="4" name="사진 자리"/>
+          <p:cNvPr id="6" name="사진 자리"/>
           <p:cNvSpPr/>
           <p:nvPr/>
         </p:nvSpPr>
         <p:spPr>
           <a:xfrm>
-            <a:off x="640080" y="1645920"/>
-            <a:ext cx="3515258" cy="2286000"/>
+            <a:off x="640080" y="1783080"/>
+            <a:ext cx="3515258" cy="2194560"/>
           </a:xfrm>
           <a:prstGeom prst="roundRect">
             <a:avLst>
@@ -5493,12 +5832,10 @@
             </a:avLst>
           </a:prstGeom>
           <a:solidFill>
-            <a:srgbClr val="EDDED4"/>
+            <a:srgbClr val="F6E2D5"/>
           </a:solidFill>
           <a:ln w="19050">
-            <a:solidFill>
-              <a:srgbClr val="765037"/>
-            </a:solidFill>
+            <a:noFill/>
             <a:prstDash val="dash"/>
           </a:ln>
         </p:spPr>
@@ -5516,7 +5853,7 @@
             <a:r>
               <a:rPr sz="1200" b="0" i="0">
                 <a:solidFill>
-                  <a:srgbClr val="37261A"/>
+                  <a:srgbClr val="8E8780"/>
                 </a:solidFill>
               </a:rPr>
               <a:t>사진 1</a:t>
@@ -5526,14 +5863,14 @@
       </p:sp>
       <p:sp>
         <p:nvSpPr>
-          <p:cNvPr id="5" name="사진 자리"/>
+          <p:cNvPr id="7" name="사진 자리"/>
           <p:cNvSpPr/>
           <p:nvPr/>
         </p:nvSpPr>
         <p:spPr>
           <a:xfrm>
-            <a:off x="4338218" y="1645920"/>
-            <a:ext cx="3515258" cy="2286000"/>
+            <a:off x="4338218" y="1783080"/>
+            <a:ext cx="3515258" cy="2194560"/>
           </a:xfrm>
           <a:prstGeom prst="roundRect">
             <a:avLst>
@@ -5541,12 +5878,10 @@
             </a:avLst>
           </a:prstGeom>
           <a:solidFill>
-            <a:srgbClr val="EDDED4"/>
+            <a:srgbClr val="F6E2D5"/>
           </a:solidFill>
           <a:ln w="19050">
-            <a:solidFill>
-              <a:srgbClr val="765037"/>
-            </a:solidFill>
+            <a:noFill/>
             <a:prstDash val="dash"/>
           </a:ln>
         </p:spPr>
@@ -5564,7 +5899,7 @@
             <a:r>
               <a:rPr sz="1200" b="0" i="0">
                 <a:solidFill>
-                  <a:srgbClr val="37261A"/>
+                  <a:srgbClr val="8E8780"/>
                 </a:solidFill>
               </a:rPr>
               <a:t>사진 2</a:t>
@@ -5574,14 +5909,14 @@
       </p:sp>
       <p:sp>
         <p:nvSpPr>
-          <p:cNvPr id="6" name="사진 자리"/>
+          <p:cNvPr id="8" name="사진 자리"/>
           <p:cNvSpPr/>
           <p:nvPr/>
         </p:nvSpPr>
         <p:spPr>
           <a:xfrm>
-            <a:off x="8036356" y="1645920"/>
-            <a:ext cx="3515258" cy="2286000"/>
+            <a:off x="8036356" y="1783080"/>
+            <a:ext cx="3515258" cy="2194560"/>
           </a:xfrm>
           <a:prstGeom prst="roundRect">
             <a:avLst>
@@ -5589,12 +5924,10 @@
             </a:avLst>
           </a:prstGeom>
           <a:solidFill>
-            <a:srgbClr val="EDDED4"/>
+            <a:srgbClr val="F6E2D5"/>
           </a:solidFill>
           <a:ln w="19050">
-            <a:solidFill>
-              <a:srgbClr val="765037"/>
-            </a:solidFill>
+            <a:noFill/>
             <a:prstDash val="dash"/>
           </a:ln>
         </p:spPr>
@@ -5612,7 +5945,7 @@
             <a:r>
               <a:rPr sz="1200" b="0" i="0">
                 <a:solidFill>
-                  <a:srgbClr val="37261A"/>
+                  <a:srgbClr val="8E8780"/>
                 </a:solidFill>
               </a:rPr>
               <a:t>사진 3</a:t>
@@ -5622,14 +5955,14 @@
       </p:sp>
       <p:sp>
         <p:nvSpPr>
-          <p:cNvPr id="7" name="사진 자리"/>
+          <p:cNvPr id="9" name="사진 자리"/>
           <p:cNvSpPr/>
           <p:nvPr/>
         </p:nvSpPr>
         <p:spPr>
           <a:xfrm>
-            <a:off x="640080" y="4114800"/>
-            <a:ext cx="3515258" cy="2286000"/>
+            <a:off x="640080" y="4160520"/>
+            <a:ext cx="3515258" cy="2194560"/>
           </a:xfrm>
           <a:prstGeom prst="roundRect">
             <a:avLst>
@@ -5637,12 +5970,10 @@
             </a:avLst>
           </a:prstGeom>
           <a:solidFill>
-            <a:srgbClr val="EDDED4"/>
+            <a:srgbClr val="F6E2D5"/>
           </a:solidFill>
           <a:ln w="19050">
-            <a:solidFill>
-              <a:srgbClr val="765037"/>
-            </a:solidFill>
+            <a:noFill/>
             <a:prstDash val="dash"/>
           </a:ln>
         </p:spPr>
@@ -5660,7 +5991,7 @@
             <a:r>
               <a:rPr sz="1200" b="0" i="0">
                 <a:solidFill>
-                  <a:srgbClr val="37261A"/>
+                  <a:srgbClr val="8E8780"/>
                 </a:solidFill>
               </a:rPr>
               <a:t>사진 4</a:t>
@@ -5670,14 +6001,14 @@
       </p:sp>
       <p:sp>
         <p:nvSpPr>
-          <p:cNvPr id="8" name="사진 자리"/>
+          <p:cNvPr id="10" name="사진 자리"/>
           <p:cNvSpPr/>
           <p:nvPr/>
         </p:nvSpPr>
         <p:spPr>
           <a:xfrm>
-            <a:off x="4338218" y="4114800"/>
-            <a:ext cx="3515258" cy="2286000"/>
+            <a:off x="4338218" y="4160520"/>
+            <a:ext cx="3515258" cy="2194560"/>
           </a:xfrm>
           <a:prstGeom prst="roundRect">
             <a:avLst>
@@ -5685,12 +6016,10 @@
             </a:avLst>
           </a:prstGeom>
           <a:solidFill>
-            <a:srgbClr val="EDDED4"/>
+            <a:srgbClr val="F6E2D5"/>
           </a:solidFill>
           <a:ln w="19050">
-            <a:solidFill>
-              <a:srgbClr val="765037"/>
-            </a:solidFill>
+            <a:noFill/>
             <a:prstDash val="dash"/>
           </a:ln>
         </p:spPr>
@@ -5708,7 +6037,7 @@
             <a:r>
               <a:rPr sz="1200" b="0" i="0">
                 <a:solidFill>
-                  <a:srgbClr val="37261A"/>
+                  <a:srgbClr val="8E8780"/>
                 </a:solidFill>
               </a:rPr>
               <a:t>사진 5</a:t>
@@ -5718,14 +6047,14 @@
       </p:sp>
       <p:sp>
         <p:nvSpPr>
-          <p:cNvPr id="9" name="사진 자리"/>
+          <p:cNvPr id="11" name="사진 자리"/>
           <p:cNvSpPr/>
           <p:nvPr/>
         </p:nvSpPr>
         <p:spPr>
           <a:xfrm>
-            <a:off x="8036356" y="4114800"/>
-            <a:ext cx="3515258" cy="2286000"/>
+            <a:off x="8036356" y="4160520"/>
+            <a:ext cx="3515258" cy="2194560"/>
           </a:xfrm>
           <a:prstGeom prst="roundRect">
             <a:avLst>
@@ -5733,12 +6062,10 @@
             </a:avLst>
           </a:prstGeom>
           <a:solidFill>
-            <a:srgbClr val="EDDED4"/>
+            <a:srgbClr val="F6E2D5"/>
           </a:solidFill>
           <a:ln w="19050">
-            <a:solidFill>
-              <a:srgbClr val="765037"/>
-            </a:solidFill>
+            <a:noFill/>
             <a:prstDash val="dash"/>
           </a:ln>
         </p:spPr>
@@ -5756,7 +6083,7 @@
             <a:r>
               <a:rPr sz="1200" b="0" i="0">
                 <a:solidFill>
-                  <a:srgbClr val="37261A"/>
+                  <a:srgbClr val="8E8780"/>
                 </a:solidFill>
               </a:rPr>
               <a:t>사진 6</a:t>
@@ -5775,6 +6102,14 @@
 <file path=ppt/slides/slide6.xml><?xml version="1.0" encoding="utf-8"?>
 <p:sld xmlns:a="http://schemas.openxmlformats.org/drawingml/2006/main" xmlns:p="http://schemas.openxmlformats.org/presentationml/2006/main" xmlns:r="http://schemas.openxmlformats.org/officeDocument/2006/relationships">
   <p:cSld>
+    <p:bg>
+      <p:bgPr>
+        <a:solidFill>
+          <a:srgbClr val="FBF2EC"/>
+        </a:solidFill>
+        <a:effectLst/>
+      </p:bgPr>
+    </p:bg>
     <p:spTree>
       <p:nvGrpSpPr>
         <p:cNvPr id="1" name=""/>
@@ -5782,30 +6117,116 @@
         <p:nvPr/>
       </p:nvGrpSpPr>
       <p:grpSpPr/>
-      <p:pic>
-        <p:nvPicPr>
-          <p:cNvPr id="3" name="표지 그림" descr="family-32.jpg"/>
-          <p:cNvPicPr>
-            <a:picLocks noChangeAspect="1"/>
-          </p:cNvPicPr>
-          <p:nvPr/>
-        </p:nvPicPr>
-        <p:blipFill>
-          <a:blip r:embed="rId2"/>
-          <a:stretch>
-            <a:fillRect/>
-          </a:stretch>
-        </p:blipFill>
-        <p:spPr>
-          <a:xfrm>
-            <a:off x="0" y="0"/>
-            <a:ext cx="12191695" cy="6858000"/>
+      <p:sp>
+        <p:nvSpPr>
+          <p:cNvPr id="3" name="사진 자리"/>
+          <p:cNvSpPr/>
+          <p:nvPr/>
+        </p:nvSpPr>
+        <p:spPr>
+          <a:xfrm>
+            <a:off x="7802684" y="0"/>
+            <a:ext cx="4389010" cy="6858000"/>
           </a:xfrm>
           <a:prstGeom prst="rect">
             <a:avLst/>
           </a:prstGeom>
-        </p:spPr>
-      </p:pic>
+          <a:solidFill>
+            <a:srgbClr val="EBC6AD"/>
+          </a:solidFill>
+          <a:ln>
+            <a:noFill/>
+          </a:ln>
+        </p:spPr>
+        <p:txBody>
+          <a:bodyPr rtlCol="0" anchor="ctr" wrap="square" lIns="54864" rIns="54864" tIns="27432" bIns="27432">
+            <a:noAutofit/>
+          </a:bodyPr>
+          <a:lstStyle/>
+          <a:p>
+            <a:pPr algn="ctr">
+              <a:lnSpc>
+                <a:spcPct val="100000"/>
+              </a:lnSpc>
+            </a:pPr>
+            <a:r>
+              <a:rPr sz="1400" b="0" i="0">
+                <a:solidFill>
+                  <a:srgbClr val="493527"/>
+                </a:solidFill>
+              </a:rPr>
+              <a:t>사진을 넣어 주세요</a:t>
+            </a:r>
+          </a:p>
+        </p:txBody>
+      </p:sp>
+      <p:sp>
+        <p:nvSpPr>
+          <p:cNvPr id="4" name="장식"/>
+          <p:cNvSpPr/>
+          <p:nvPr/>
+        </p:nvSpPr>
+        <p:spPr>
+          <a:xfrm>
+            <a:off x="8168435" y="365760"/>
+            <a:ext cx="3657508" cy="6126480"/>
+          </a:xfrm>
+          <a:prstGeom prst="rect">
+            <a:avLst/>
+          </a:prstGeom>
+          <a:noFill/>
+          <a:ln w="9525">
+            <a:solidFill>
+              <a:srgbClr val="26231F"/>
+            </a:solidFill>
+          </a:ln>
+        </p:spPr>
+        <p:txBody>
+          <a:bodyPr rtlCol="0" anchor="ctr"/>
+          <a:lstStyle/>
+          <a:p>
+            <a:pPr algn="ctr"/>
+          </a:p>
+        </p:txBody>
+      </p:sp>
+      <p:sp>
+        <p:nvSpPr>
+          <p:cNvPr id="5" name="라벨"/>
+          <p:cNvSpPr txBox="1"/>
+          <p:nvPr/>
+        </p:nvSpPr>
+        <p:spPr>
+          <a:xfrm>
+            <a:off x="822960" y="2148840"/>
+            <a:ext cx="5608179" cy="274320"/>
+          </a:xfrm>
+          <a:prstGeom prst="rect">
+            <a:avLst/>
+          </a:prstGeom>
+          <a:noFill/>
+        </p:spPr>
+        <p:txBody>
+          <a:bodyPr wrap="square" lIns="54864" rIns="54864" tIns="27432" bIns="27432" anchor="t">
+            <a:noAutofit/>
+          </a:bodyPr>
+          <a:lstStyle/>
+          <a:p>
+            <a:pPr algn="l">
+              <a:lnSpc>
+                <a:spcPct val="115000"/>
+              </a:lnSpc>
+            </a:pPr>
+            <a:r>
+              <a:rPr sz="1000" b="1" i="0" spc="250">
+                <a:solidFill>
+                  <a:srgbClr val="26231F"/>
+                </a:solidFill>
+              </a:rPr>
+              <a:t>FAMILY ALBUM</a:t>
+            </a:r>
+          </a:p>
+        </p:txBody>
+      </p:sp>
       <p:sp>
         <p:nvSpPr>
           <p:cNvPr id="2" name="Title 1"/>
@@ -5818,8 +6239,8 @@
         </p:nvSpPr>
         <p:spPr>
           <a:xfrm>
-            <a:off x="853418" y="2057400"/>
-            <a:ext cx="6095847" cy="1554480"/>
+            <a:off x="822960" y="2606040"/>
+            <a:ext cx="5608179" cy="1188720"/>
           </a:xfrm>
         </p:spPr>
         <p:txBody>
@@ -5834,9 +6255,9 @@
               </a:lnSpc>
             </a:pPr>
             <a:r>
-              <a:rPr sz="3600" b="1" i="0">
-                <a:solidFill>
-                  <a:srgbClr val="37261A"/>
+              <a:rPr sz="4000" b="1" i="0">
+                <a:solidFill>
+                  <a:srgbClr val="26231F"/>
                 </a:solidFill>
               </a:rPr>
               <a:t>우리 가족 소개를 마칩니다</a:t>
@@ -5846,14 +6267,14 @@
       </p:sp>
       <p:sp>
         <p:nvSpPr>
-          <p:cNvPr id="4" name="한 줄 문구"/>
+          <p:cNvPr id="6" name="한 줄 문구"/>
           <p:cNvSpPr txBox="1"/>
           <p:nvPr/>
         </p:nvSpPr>
         <p:spPr>
           <a:xfrm>
-            <a:off x="853418" y="3749039"/>
-            <a:ext cx="6095847" cy="822960"/>
+            <a:off x="822960" y="3886200"/>
+            <a:ext cx="5608179" cy="822960"/>
           </a:xfrm>
           <a:prstGeom prst="rect">
             <a:avLst/>
@@ -5872,9 +6293,9 @@
               </a:lnSpc>
             </a:pPr>
             <a:r>
-              <a:rPr sz="1700" b="0" i="1">
-                <a:solidFill>
-                  <a:srgbClr val="37261A"/>
+              <a:rPr sz="1700" b="0" i="0">
+                <a:solidFill>
+                  <a:srgbClr val="26231F"/>
                 </a:solidFill>
               </a:rPr>
               <a:t>읽어 주셔서 고맙습니다</a:t>
@@ -5884,14 +6305,14 @@
       </p:sp>
       <p:sp>
         <p:nvSpPr>
-          <p:cNvPr id="5" name="안내 문구"/>
+          <p:cNvPr id="7" name="안내 문구"/>
           <p:cNvSpPr txBox="1"/>
           <p:nvPr/>
         </p:nvSpPr>
         <p:spPr>
           <a:xfrm>
-            <a:off x="853418" y="4617720"/>
-            <a:ext cx="6095847" cy="914400"/>
+            <a:off x="822960" y="4754880"/>
+            <a:ext cx="5608179" cy="914400"/>
           </a:xfrm>
           <a:prstGeom prst="rect">
             <a:avLst/>
@@ -5912,7 +6333,7 @@
             <a:r>
               <a:rPr sz="1400" b="0" i="0">
                 <a:solidFill>
-                  <a:srgbClr val="666666"/>
+                  <a:srgbClr val="26231F"/>
                 </a:solidFill>
               </a:rPr>
               <a:t>고맙습니다 · 가족 이름</a:t>
@@ -5939,34 +6360,34 @@
         <a:sysClr val="window" lastClr="FFFFFF"/>
       </a:lt1>
       <a:dk2>
-        <a:srgbClr val="37261A"/>
+        <a:srgbClr val="493527"/>
       </a:dk2>
       <a:lt2>
-        <a:srgbClr val="F8F4F1"/>
+        <a:srgbClr val="FBF2EC"/>
       </a:lt2>
       <a:accent1>
-        <a:srgbClr val="765037"/>
+        <a:srgbClr val="D89F79"/>
       </a:accent1>
       <a:accent2>
-        <a:srgbClr val="418B83"/>
+        <a:srgbClr val="E1D798"/>
       </a:accent2>
       <a:accent3>
-        <a:srgbClr val="37261A"/>
+        <a:srgbClr val="493527"/>
       </a:accent3>
       <a:accent4>
-        <a:srgbClr val="EDDED4"/>
+        <a:srgbClr val="F6E2D5"/>
       </a:accent4>
       <a:accent5>
-        <a:srgbClr val="5C6E5D"/>
+        <a:srgbClr val="DCBB88"/>
       </a:accent5>
       <a:accent6>
-        <a:srgbClr val="877D76"/>
+        <a:srgbClr val="92867D"/>
       </a:accent6>
       <a:hlink>
-        <a:srgbClr val="765037"/>
+        <a:srgbClr val="D89F79"/>
       </a:hlink>
       <a:folHlink>
-        <a:srgbClr val="37261A"/>
+        <a:srgbClr val="493527"/>
       </a:folHlink>
     </a:clrScheme>
     <a:fontScheme name="Office">
